--- a/AI09-UseMode.pptx
+++ b/AI09-UseMode.pptx
@@ -32,8 +32,8 @@
     <p:sldId id="265" r:id="rId20"/>
     <p:sldId id="288" r:id="rId21"/>
     <p:sldId id="289" r:id="rId22"/>
-    <p:sldId id="291" r:id="rId23"/>
-    <p:sldId id="292" r:id="rId24"/>
+    <p:sldId id="292" r:id="rId23"/>
+    <p:sldId id="293" r:id="rId24"/>
   </p:sldIdLst>
   <p:sldSz cx="9144000" cy="6858000" type="screen4x3"/>
   <p:notesSz cx="6648450" cy="9782175"/>
@@ -3807,12 +3807,14 @@
           <a:p>
             <a:pPr lvl="1"/>
             <a:r>
-              <a:rPr lang="fr-FR"/>
-              <a:t>Encore peu </a:t>
-            </a:r>
-            <a:r>
-              <a:rPr lang="fr-FR" dirty="0"/>
-              <a:t>présent dans le monde linux</a:t>
+              <a:rPr lang="fr-FR" dirty="0"/>
+              <a:t>Encore peu présent dans le monde linux</a:t>
+            </a:r>
+          </a:p>
+          <a:p>
+            <a:r>
+              <a:rPr lang="fr-FR" dirty="0"/>
+              <a:t>Intégration Windows et Office 365</a:t>
             </a:r>
           </a:p>
         </p:txBody>
@@ -4054,8 +4056,13 @@
             </a:r>
             <a:r>
               <a:rPr lang="fr-FR" dirty="0"/>
-              <a:t> et de IaaS</a:t>
-            </a:r>
+              <a:t> et de *</a:t>
+            </a:r>
+            <a:r>
+              <a:rPr lang="fr-FR" dirty="0" err="1"/>
+              <a:t>aaS</a:t>
+            </a:r>
+            <a:endParaRPr lang="fr-FR" dirty="0"/>
           </a:p>
         </p:txBody>
       </p:sp>
@@ -4892,7 +4899,7 @@
             </a:r>
             <a:r>
               <a:rPr lang="fr-FR" dirty="0" err="1"/>
-              <a:t>Nvidia</a:t>
+              <a:t>NVidia</a:t>
             </a:r>
             <a:endParaRPr lang="fr-FR" dirty="0"/>
           </a:p>
@@ -4905,22 +4912,14 @@
           <a:p>
             <a:r>
               <a:rPr lang="fr-FR" dirty="0"/>
-              <a:t>Implémentation proche de CUDA des procédés mathématiques de l'inférence et de la back propagation</a:t>
+              <a:t>Implémentation CUDA des procédés mathématiques de l'inférence et de la back propagation</a:t>
             </a:r>
           </a:p>
           <a:p>
             <a:pPr lvl="1"/>
             <a:r>
               <a:rPr lang="fr-FR" dirty="0"/>
-              <a:t>Convolution, Masques, Somme pondérée, </a:t>
-            </a:r>
-            <a:r>
-              <a:rPr lang="fr-FR" dirty="0" err="1"/>
-              <a:t>Sigmoide</a:t>
-            </a:r>
-            <a:r>
-              <a:rPr lang="fr-FR" dirty="0"/>
-              <a:t>, </a:t>
+              <a:t>Convolution, Somme pondérée, Sigmoïde, </a:t>
             </a:r>
             <a:r>
               <a:rPr lang="fr-FR" dirty="0" err="1"/>
@@ -5476,7 +5475,13 @@
       </p:grpSpPr>
       <p:sp>
         <p:nvSpPr>
-          <p:cNvPr id="2" name="Titre 1"/>
+          <p:cNvPr id="2" name="Titre 1">
+            <a:extLst>
+              <a:ext uri="{FF2B5EF4-FFF2-40B4-BE49-F238E27FC236}">
+                <a16:creationId xmlns:a16="http://schemas.microsoft.com/office/drawing/2014/main" id="{36EE2404-57D7-D1EC-9E6F-5470D3C2A03D}"/>
+              </a:ext>
+            </a:extLst>
+          </p:cNvPr>
           <p:cNvSpPr>
             <a:spLocks noGrp="1"/>
           </p:cNvSpPr>
@@ -5490,15 +5495,22 @@
           <a:lstStyle/>
           <a:p>
             <a:r>
-              <a:rPr lang="fr-FR" dirty="0"/>
-              <a:t>CUDA</a:t>
-            </a:r>
-          </a:p>
-        </p:txBody>
-      </p:sp>
-      <p:sp>
-        <p:nvSpPr>
-          <p:cNvPr id="3" name="Espace réservé du contenu 2"/>
+              <a:rPr lang="fr-FR" dirty="0" err="1"/>
+              <a:t>PyTorch</a:t>
+            </a:r>
+            <a:endParaRPr lang="fr-FR" dirty="0"/>
+          </a:p>
+        </p:txBody>
+      </p:sp>
+      <p:sp>
+        <p:nvSpPr>
+          <p:cNvPr id="3" name="Espace réservé du contenu 2">
+            <a:extLst>
+              <a:ext uri="{FF2B5EF4-FFF2-40B4-BE49-F238E27FC236}">
+                <a16:creationId xmlns:a16="http://schemas.microsoft.com/office/drawing/2014/main" id="{D8A266E1-4DB2-8A20-7FFB-C80ECC898030}"/>
+              </a:ext>
+            </a:extLst>
+          </p:cNvPr>
           <p:cNvSpPr>
             <a:spLocks noGrp="1"/>
           </p:cNvSpPr>
@@ -5513,119 +5525,58 @@
           <a:p>
             <a:r>
               <a:rPr lang="fr-FR" dirty="0"/>
-              <a:t>API et Architecture </a:t>
+              <a:t>Concurrent de Google </a:t>
             </a:r>
             <a:r>
               <a:rPr lang="fr-FR" dirty="0" err="1"/>
-              <a:t>NVidia</a:t>
-            </a:r>
-            <a:r>
-              <a:rPr lang="fr-FR" dirty="0"/>
-              <a:t> de traitement parallèle de GPU</a:t>
-            </a:r>
-          </a:p>
-          <a:p>
-            <a:r>
-              <a:rPr lang="fr-FR" dirty="0"/>
-              <a:t>Obligatoire pour </a:t>
-            </a:r>
+              <a:t>Tensorflow</a:t>
+            </a:r>
+            <a:endParaRPr lang="fr-FR" dirty="0"/>
+          </a:p>
+          <a:p>
+            <a:pPr lvl="1"/>
+            <a:r>
+              <a:rPr lang="fr-FR" dirty="0"/>
+              <a:t>Facebook</a:t>
+            </a:r>
+          </a:p>
+          <a:p>
+            <a:pPr lvl="1"/>
+            <a:r>
+              <a:rPr lang="fr-FR" dirty="0"/>
+              <a:t>Installation identique</a:t>
+            </a:r>
+          </a:p>
+          <a:p>
+            <a:pPr lvl="1"/>
             <a:r>
               <a:rPr lang="fr-FR" dirty="0" err="1"/>
-              <a:t>TensorFlow</a:t>
-            </a:r>
-            <a:r>
-              <a:rPr lang="fr-FR" dirty="0"/>
-              <a:t> GPU</a:t>
-            </a:r>
-          </a:p>
-          <a:p>
-            <a:pPr lvl="1"/>
-            <a:r>
-              <a:rPr lang="fr-FR" dirty="0"/>
-              <a:t>Uniquement pour cartes graphiques haut de gamme</a:t>
-            </a:r>
-          </a:p>
-          <a:p>
-            <a:pPr lvl="1"/>
-            <a:r>
-              <a:rPr lang="fr-FR" dirty="0"/>
-              <a:t>Compatible cartes </a:t>
+              <a:t>pip</a:t>
+            </a:r>
+            <a:r>
+              <a:rPr lang="fr-FR" dirty="0"/>
+              <a:t> </a:t>
             </a:r>
             <a:r>
               <a:rPr lang="fr-FR" dirty="0" err="1"/>
-              <a:t>mutliples</a:t>
+              <a:t>install</a:t>
+            </a:r>
+            <a:r>
+              <a:rPr lang="fr-FR" dirty="0"/>
+              <a:t> </a:t>
+            </a:r>
+            <a:r>
+              <a:rPr lang="fr-FR" dirty="0" err="1"/>
+              <a:t>pytorch</a:t>
             </a:r>
             <a:endParaRPr lang="fr-FR" dirty="0"/>
           </a:p>
           <a:p>
-            <a:pPr lvl="1"/>
-            <a:r>
-              <a:rPr lang="fr-FR" dirty="0"/>
-              <a:t>Compatible TPU et ferme de GPU</a:t>
-            </a:r>
-          </a:p>
-          <a:p>
-            <a:r>
-              <a:rPr lang="fr-FR" dirty="0"/>
-              <a:t>CUDA </a:t>
-            </a:r>
-            <a:r>
-              <a:rPr lang="fr-FR" dirty="0" err="1"/>
-              <a:t>Toolkit</a:t>
+            <a:r>
+              <a:rPr lang="fr-FR"/>
+              <a:t>Très utilisé dans le monde du LLM</a:t>
             </a:r>
             <a:endParaRPr lang="fr-FR" dirty="0"/>
-          </a:p>
-          <a:p>
-            <a:pPr lvl="1"/>
-            <a:r>
-              <a:rPr lang="fr-FR" dirty="0" err="1"/>
-              <a:t>Toolkit</a:t>
-            </a:r>
-            <a:r>
-              <a:rPr lang="fr-FR" dirty="0"/>
-              <a:t> de programmation parallèle sur GPU</a:t>
-            </a:r>
-          </a:p>
-          <a:p>
-            <a:pPr lvl="1"/>
-            <a:r>
-              <a:rPr lang="fr-FR" dirty="0"/>
-              <a:t>CUPTI : Outil de </a:t>
-            </a:r>
-            <a:r>
-              <a:rPr lang="fr-FR" dirty="0" err="1"/>
-              <a:t>debugging</a:t>
-            </a:r>
-            <a:r>
-              <a:rPr lang="fr-FR" dirty="0"/>
-              <a:t> et </a:t>
-            </a:r>
-            <a:r>
-              <a:rPr lang="fr-FR" dirty="0" err="1"/>
-              <a:t>tracage</a:t>
-            </a:r>
-            <a:r>
-              <a:rPr lang="fr-FR" dirty="0"/>
-              <a:t> de GPU</a:t>
-            </a:r>
-          </a:p>
-          <a:p>
-            <a:r>
-              <a:rPr lang="fr-FR" dirty="0" err="1"/>
-              <a:t>NVidia</a:t>
-            </a:r>
-            <a:r>
-              <a:rPr lang="fr-FR" dirty="0"/>
-              <a:t> </a:t>
-            </a:r>
-            <a:r>
-              <a:rPr lang="fr-FR" dirty="0" err="1"/>
-              <a:t>Deep</a:t>
-            </a:r>
-            <a:r>
-              <a:rPr lang="fr-FR" dirty="0"/>
-              <a:t> Learning SDK est basé sur CUDA</a:t>
-            </a:r>
           </a:p>
           <a:p>
             <a:pPr lvl="1"/>
@@ -5636,7 +5587,7 @@
     </p:spTree>
     <p:extLst>
       <p:ext uri="{BB962C8B-B14F-4D97-AF65-F5344CB8AC3E}">
-        <p14:creationId xmlns:p14="http://schemas.microsoft.com/office/powerpoint/2010/main" val="540292332"/>
+        <p14:creationId xmlns:p14="http://schemas.microsoft.com/office/powerpoint/2010/main" val="194904241"/>
       </p:ext>
     </p:extLst>
   </p:cSld>
@@ -5668,7 +5619,7 @@
           <p:cNvPr id="2" name="Titre 1">
             <a:extLst>
               <a:ext uri="{FF2B5EF4-FFF2-40B4-BE49-F238E27FC236}">
-                <a16:creationId xmlns:a16="http://schemas.microsoft.com/office/drawing/2014/main" id="{36EE2404-57D7-D1EC-9E6F-5470D3C2A03D}"/>
+                <a16:creationId xmlns:a16="http://schemas.microsoft.com/office/drawing/2014/main" id="{B59BF277-4E6B-9AED-DEBC-5281B82C0BFA}"/>
               </a:ext>
             </a:extLst>
           </p:cNvPr>
@@ -5685,10 +5636,9 @@
           <a:lstStyle/>
           <a:p>
             <a:r>
-              <a:rPr lang="fr-FR" dirty="0" err="1"/>
-              <a:t>PyTorch</a:t>
-            </a:r>
-            <a:endParaRPr lang="fr-FR" dirty="0"/>
+              <a:rPr lang="fr-FR" dirty="0"/>
+              <a:t>API</a:t>
+            </a:r>
           </a:p>
         </p:txBody>
       </p:sp>
@@ -5697,7 +5647,7 @@
           <p:cNvPr id="3" name="Espace réservé du contenu 2">
             <a:extLst>
               <a:ext uri="{FF2B5EF4-FFF2-40B4-BE49-F238E27FC236}">
-                <a16:creationId xmlns:a16="http://schemas.microsoft.com/office/drawing/2014/main" id="{D8A266E1-4DB2-8A20-7FFB-C80ECC898030}"/>
+                <a16:creationId xmlns:a16="http://schemas.microsoft.com/office/drawing/2014/main" id="{2E43B63A-BD7B-209E-DB7D-E98E9067CA9E}"/>
               </a:ext>
             </a:extLst>
           </p:cNvPr>
@@ -5715,69 +5665,36 @@
           <a:p>
             <a:r>
               <a:rPr lang="fr-FR" dirty="0"/>
-              <a:t>Concurrent de Google </a:t>
-            </a:r>
-            <a:r>
-              <a:rPr lang="fr-FR" dirty="0" err="1"/>
-              <a:t>Tensorflow</a:t>
-            </a:r>
-            <a:endParaRPr lang="fr-FR" dirty="0"/>
+              <a:t>Chaque LLM est appelable par API</a:t>
+            </a:r>
           </a:p>
           <a:p>
             <a:pPr lvl="1"/>
             <a:r>
               <a:rPr lang="fr-FR" dirty="0"/>
-              <a:t>Facebook</a:t>
+              <a:t>Sans installer en local</a:t>
             </a:r>
           </a:p>
           <a:p>
             <a:pPr lvl="1"/>
             <a:r>
               <a:rPr lang="fr-FR" dirty="0"/>
-              <a:t>Installation identique</a:t>
+              <a:t>Adaptable aux données locales</a:t>
             </a:r>
           </a:p>
           <a:p>
             <a:pPr lvl="1"/>
             <a:r>
-              <a:rPr lang="fr-FR" dirty="0" err="1"/>
-              <a:t>pip</a:t>
-            </a:r>
-            <a:r>
-              <a:rPr lang="fr-FR" dirty="0"/>
-              <a:t> </a:t>
-            </a:r>
-            <a:r>
-              <a:rPr lang="fr-FR" dirty="0" err="1"/>
-              <a:t>install</a:t>
-            </a:r>
-            <a:r>
-              <a:rPr lang="fr-FR" dirty="0"/>
-              <a:t> </a:t>
-            </a:r>
-            <a:r>
-              <a:rPr lang="fr-FR" dirty="0" err="1"/>
-              <a:t>pytorch</a:t>
-            </a:r>
-            <a:endParaRPr lang="fr-FR" dirty="0"/>
-          </a:p>
-          <a:p>
-            <a:r>
-              <a:rPr lang="fr-FR"/>
-              <a:t>Très utilisé dans le monde du LLM</a:t>
-            </a:r>
-            <a:endParaRPr lang="fr-FR" dirty="0"/>
-          </a:p>
-          <a:p>
-            <a:pPr lvl="1"/>
-            <a:endParaRPr lang="fr-FR" dirty="0"/>
+              <a:rPr lang="fr-FR" dirty="0"/>
+              <a:t>Payant</a:t>
+            </a:r>
           </a:p>
         </p:txBody>
       </p:sp>
     </p:spTree>
     <p:extLst>
       <p:ext uri="{BB962C8B-B14F-4D97-AF65-F5344CB8AC3E}">
-        <p14:creationId xmlns:p14="http://schemas.microsoft.com/office/powerpoint/2010/main" val="194904241"/>
+        <p14:creationId xmlns:p14="http://schemas.microsoft.com/office/powerpoint/2010/main" val="4271723807"/>
       </p:ext>
     </p:extLst>
   </p:cSld>
